--- a/docs/RSA_Wiener_Attack_EN.pptx
+++ b/docs/RSA_Wiener_Attack_EN.pptx
@@ -642,17 +642,7 @@
         <p:txBody>
           <a:bodyPr/>
           <a:lstStyle/>
-          <a:p>
-            <a:r>
-              <a:t>Switch to a terminal at the project root and run python -B scripts/demo.py. Explain that both keys are generated live and have actual 2048-bit moduli. The weak key has d/T near 0.75. The reference private values are used only for final verification and are not passed to the attack. Point out the successful candidate, then follow the output through φ, p+q, the discriminant, p, q, and d. Finish with the successful decryption checks. The normal key uses e=65537 and returns None in this run.</a:t>
-            </a:r>
-          </a:p>
           <a:p/>
-          <a:p>
-            <a:r>
-              <a:t>Sources: PRESENTATION_SCRIPT_EN.md; DEMO_GUIDE.md</a:t>
-            </a:r>
-          </a:p>
         </p:txBody>
       </p:sp>
       <p:sp>
@@ -723,17 +713,7 @@
         <p:txBody>
           <a:bodyPr/>
           <a:lstStyle/>
-          <a:p>
-            <a:r>
-              <a:t>The left plot fixes a 512-bit modulus and varies d/T with 30 trials per group. The red dashed line marks the classical boundary at d/T=1. Every tested key inside the boundary was recovered. In this dataset, the 1.25 and 1.5 groups also reached 30/30. At d/T=2.0, recovery fell to 25/30, then declined overall, though some samples beyond the boundary still succeeded. The right plot fixes d/T at 0.75 and compares attack time for 256-, 512-, 1024-, and 2048-bit moduli. Every group reached 30/30. Median runtime increased with bit length, reaching 4.23 ms at 2048 bits. Error bars show the measured minimum to maximum, and attack timing excludes key generation. The lower-right table compares weak and normal 2048-bit keys using the same attack function. The weak group had median d/T=0.75 and 30/30 recoveries; the normal group had median d/T about 2.578×10^462 and 0/30 recoveries. None means Wiener’s attack did not recover these samples. It is not a complete proof of RSA security against every attack.</a:t>
-            </a:r>
-          </a:p>
           <a:p/>
-          <a:p>
-            <a:r>
-              <a:t>Sources: PRESENTATION_SCRIPT_EN.md; DEMO_GUIDE.md; results/raw/e1_d_ratio.csv; results/raw/e2_modulus_bits.csv; results/raw/weak_vs_normal.csv</a:t>
-            </a:r>
-          </a:p>
         </p:txBody>
       </p:sp>
       <p:sp>
@@ -804,17 +784,7 @@
         <p:txBody>
           <a:bodyPr/>
           <a:lstStyle/>
-          <a:p>
-            <a:r>
-              <a:t>The core functions we declare as our own cover normal and weak RSA parameter generation, Wiener-bound estimation and exact checking, continued fractions and convergents, and complete Wiener candidate verification. Normal generation fixes e=65537. Weak generation chooses a small d, then derives e. Bound checks use integer arithmetic. The attack accepts only e and n and validates candidates through divisibility, perfect-square, and RSA invariant checks. Prime generation, gcd, modular inversion, and integer square root come from existing libraries or Python’s standard library.</a:t>
-            </a:r>
-          </a:p>
           <a:p/>
-          <a:p>
-            <a:r>
-              <a:t>Sources: PRESENTATION_SCRIPT_EN.md; CODE_EXPLANATION.md</a:t>
-            </a:r>
-          </a:p>
         </p:txBody>
       </p:sp>
       <p:sp>
@@ -12762,7 +12732,7 @@
                               <a:latin typeface="Cambria Math" panose="02040503050406030204" pitchFamily="18" charset="0"/>
                               <a:cs typeface="Cambria Math" panose="02040503050406030204" pitchFamily="18" charset="0"/>
                             </a:rPr>
-                            <m:t>e</m:t>
+                            <m:t>𝑒</m:t>
                           </m:r>
                           <m:sSub>
                             <m:sSubPr>
@@ -12784,7 +12754,7 @@
                                   <a:latin typeface="Cambria Math" panose="02040503050406030204" pitchFamily="18" charset="0"/>
                                   <a:cs typeface="Cambria Math" panose="02040503050406030204" pitchFamily="18" charset="0"/>
                                 </a:rPr>
-                                <m:t>d</m:t>
+                                <m:t>𝑑</m:t>
                               </m:r>
                             </m:e>
                             <m:sub>
@@ -16367,8 +16337,8 @@
         </p:blipFill>
         <p:spPr>
           <a:xfrm>
-            <a:off x="7353300" y="840658"/>
-            <a:ext cx="4343400" cy="2714625"/>
+            <a:off x="6736080" y="1023620"/>
+            <a:ext cx="5215890" cy="3260090"/>
           </a:xfrm>
           <a:prstGeom prst="rect">
             <a:avLst/>
@@ -16385,7 +16355,7 @@
         </p:nvSpPr>
         <p:spPr>
           <a:xfrm>
-            <a:off x="7353300" y="3602908"/>
+            <a:off x="7353300" y="4532548"/>
             <a:ext cx="4343400" cy="266700"/>
           </a:xfrm>
           <a:prstGeom prst="rect">
@@ -16543,7 +16513,7 @@
           <p:nvPr/>
         </p:nvGraphicFramePr>
         <p:xfrm>
-          <a:off x="7353300" y="3907708"/>
+          <a:off x="7353300" y="4837348"/>
           <a:ext cx="4343400" cy="1047750"/>
         </p:xfrm>
         <a:graphic>
@@ -17116,1087 +17086,6 @@
       </p:graphicFrame>
       <p:sp>
         <p:nvSpPr>
-          <p:cNvPr id="7" name="矩形 6"/>
-          <p:cNvSpPr>
-            <a:spLocks noGrp="1"/>
-          </p:cNvSpPr>
-          <p:nvPr/>
-        </p:nvSpPr>
-        <p:spPr>
-          <a:xfrm>
-            <a:off x="514350" y="5241208"/>
-            <a:ext cx="323850" cy="323850"/>
-          </a:xfrm>
-          <a:prstGeom prst="rect">
-            <a:avLst/>
-          </a:prstGeom>
-          <a:noFill/>
-          <a:ln w="0">
-            <a:noFill/>
-            <a:prstDash val="solid"/>
-          </a:ln>
-        </p:spPr>
-        <p:txBody>
-          <a:bodyPr wrap="square" lIns="0" tIns="0" rIns="0" bIns="0" anchor="ctr">
-            <a:normAutofit/>
-          </a:bodyPr>
-          <a:lstStyle>
-            <a:defPPr algn="l">
-              <a:defRPr sz="1725" b="1">
-                <a:solidFill>
-                  <a:srgbClr val="356FC0"/>
-                </a:solidFill>
-                <a:latin typeface="Aptos"/>
-                <a:ea typeface="Aptos"/>
-                <a:cs typeface="Aptos"/>
-              </a:defRPr>
-            </a:defPPr>
-            <a:lvl1pPr algn="l">
-              <a:defRPr sz="1725" b="1">
-                <a:solidFill>
-                  <a:srgbClr val="356FC0"/>
-                </a:solidFill>
-                <a:latin typeface="Aptos"/>
-                <a:ea typeface="Aptos"/>
-                <a:cs typeface="Aptos"/>
-              </a:defRPr>
-            </a:lvl1pPr>
-            <a:lvl2pPr algn="l">
-              <a:defRPr sz="1725" b="1">
-                <a:solidFill>
-                  <a:srgbClr val="356FC0"/>
-                </a:solidFill>
-                <a:latin typeface="Aptos"/>
-                <a:ea typeface="Aptos"/>
-                <a:cs typeface="Aptos"/>
-              </a:defRPr>
-            </a:lvl2pPr>
-            <a:lvl3pPr algn="l">
-              <a:defRPr sz="1725" b="1">
-                <a:solidFill>
-                  <a:srgbClr val="356FC0"/>
-                </a:solidFill>
-                <a:latin typeface="Aptos"/>
-                <a:ea typeface="Aptos"/>
-                <a:cs typeface="Aptos"/>
-              </a:defRPr>
-            </a:lvl3pPr>
-            <a:lvl4pPr algn="l">
-              <a:defRPr sz="1725" b="1">
-                <a:solidFill>
-                  <a:srgbClr val="356FC0"/>
-                </a:solidFill>
-                <a:latin typeface="Aptos"/>
-                <a:ea typeface="Aptos"/>
-                <a:cs typeface="Aptos"/>
-              </a:defRPr>
-            </a:lvl4pPr>
-            <a:lvl5pPr algn="l">
-              <a:defRPr sz="1725" b="1">
-                <a:solidFill>
-                  <a:srgbClr val="356FC0"/>
-                </a:solidFill>
-                <a:latin typeface="Aptos"/>
-                <a:ea typeface="Aptos"/>
-                <a:cs typeface="Aptos"/>
-              </a:defRPr>
-            </a:lvl5pPr>
-            <a:lvl6pPr algn="l">
-              <a:defRPr sz="1725" b="1">
-                <a:solidFill>
-                  <a:srgbClr val="356FC0"/>
-                </a:solidFill>
-                <a:latin typeface="Aptos"/>
-                <a:ea typeface="Aptos"/>
-                <a:cs typeface="Aptos"/>
-              </a:defRPr>
-            </a:lvl6pPr>
-            <a:lvl7pPr algn="l">
-              <a:defRPr sz="1725" b="1">
-                <a:solidFill>
-                  <a:srgbClr val="356FC0"/>
-                </a:solidFill>
-                <a:latin typeface="Aptos"/>
-                <a:ea typeface="Aptos"/>
-                <a:cs typeface="Aptos"/>
-              </a:defRPr>
-            </a:lvl7pPr>
-            <a:lvl8pPr algn="l">
-              <a:defRPr sz="1725" b="1">
-                <a:solidFill>
-                  <a:srgbClr val="356FC0"/>
-                </a:solidFill>
-                <a:latin typeface="Aptos"/>
-                <a:ea typeface="Aptos"/>
-                <a:cs typeface="Aptos"/>
-              </a:defRPr>
-            </a:lvl8pPr>
-            <a:lvl9pPr algn="l">
-              <a:defRPr sz="1725" b="1">
-                <a:solidFill>
-                  <a:srgbClr val="356FC0"/>
-                </a:solidFill>
-                <a:latin typeface="Aptos"/>
-                <a:ea typeface="Aptos"/>
-                <a:cs typeface="Aptos"/>
-              </a:defRPr>
-            </a:lvl9pPr>
-          </a:lstStyle>
-          <a:p>
-            <a:pPr algn="l">
-              <a:defRPr sz="1725" b="1">
-                <a:solidFill>
-                  <a:srgbClr val="356FC0"/>
-                </a:solidFill>
-                <a:latin typeface="Aptos"/>
-                <a:ea typeface="Aptos"/>
-                <a:cs typeface="Aptos"/>
-              </a:defRPr>
-            </a:pPr>
-            <a:r>
-              <a:rPr sz="1725" b="1">
-                <a:solidFill>
-                  <a:srgbClr val="356FC0"/>
-                </a:solidFill>
-                <a:latin typeface="Aptos"/>
-                <a:ea typeface="Aptos"/>
-                <a:cs typeface="Aptos"/>
-              </a:rPr>
-              <a:t>1</a:t>
-            </a:r>
-            <a:endParaRPr sz="1725" b="1">
-              <a:solidFill>
-                <a:srgbClr val="356FC0"/>
-              </a:solidFill>
-              <a:latin typeface="Aptos"/>
-              <a:ea typeface="Aptos"/>
-              <a:cs typeface="Aptos"/>
-            </a:endParaRPr>
-          </a:p>
-        </p:txBody>
-      </p:sp>
-      <p:sp>
-        <p:nvSpPr>
-          <p:cNvPr id="8" name="矩形 7"/>
-          <p:cNvSpPr>
-            <a:spLocks noGrp="1"/>
-          </p:cNvSpPr>
-          <p:nvPr/>
-        </p:nvSpPr>
-        <p:spPr>
-          <a:xfrm>
-            <a:off x="914400" y="5241208"/>
-            <a:ext cx="3124200" cy="781050"/>
-          </a:xfrm>
-          <a:prstGeom prst="rect">
-            <a:avLst/>
-          </a:prstGeom>
-          <a:noFill/>
-          <a:ln w="0">
-            <a:noFill/>
-            <a:prstDash val="solid"/>
-          </a:ln>
-        </p:spPr>
-        <p:txBody>
-          <a:bodyPr wrap="square" lIns="0" tIns="0" rIns="0" bIns="0" anchor="t">
-            <a:normAutofit/>
-          </a:bodyPr>
-          <a:lstStyle>
-            <a:defPPr algn="l">
-              <a:defRPr sz="1315" b="1">
-                <a:solidFill>
-                  <a:srgbClr val="15253A"/>
-                </a:solidFill>
-                <a:latin typeface="Aptos"/>
-                <a:ea typeface="Aptos"/>
-                <a:cs typeface="Aptos"/>
-              </a:defRPr>
-            </a:defPPr>
-            <a:lvl1pPr algn="l">
-              <a:defRPr sz="1315" b="1">
-                <a:solidFill>
-                  <a:srgbClr val="15253A"/>
-                </a:solidFill>
-                <a:latin typeface="Aptos"/>
-                <a:ea typeface="Aptos"/>
-                <a:cs typeface="Aptos"/>
-              </a:defRPr>
-            </a:lvl1pPr>
-            <a:lvl2pPr algn="l">
-              <a:defRPr sz="1315" b="1">
-                <a:solidFill>
-                  <a:srgbClr val="15253A"/>
-                </a:solidFill>
-                <a:latin typeface="Aptos"/>
-                <a:ea typeface="Aptos"/>
-                <a:cs typeface="Aptos"/>
-              </a:defRPr>
-            </a:lvl2pPr>
-            <a:lvl3pPr algn="l">
-              <a:defRPr sz="1315" b="1">
-                <a:solidFill>
-                  <a:srgbClr val="15253A"/>
-                </a:solidFill>
-                <a:latin typeface="Aptos"/>
-                <a:ea typeface="Aptos"/>
-                <a:cs typeface="Aptos"/>
-              </a:defRPr>
-            </a:lvl3pPr>
-            <a:lvl4pPr algn="l">
-              <a:defRPr sz="1315" b="1">
-                <a:solidFill>
-                  <a:srgbClr val="15253A"/>
-                </a:solidFill>
-                <a:latin typeface="Aptos"/>
-                <a:ea typeface="Aptos"/>
-                <a:cs typeface="Aptos"/>
-              </a:defRPr>
-            </a:lvl4pPr>
-            <a:lvl5pPr algn="l">
-              <a:defRPr sz="1315" b="1">
-                <a:solidFill>
-                  <a:srgbClr val="15253A"/>
-                </a:solidFill>
-                <a:latin typeface="Aptos"/>
-                <a:ea typeface="Aptos"/>
-                <a:cs typeface="Aptos"/>
-              </a:defRPr>
-            </a:lvl5pPr>
-            <a:lvl6pPr algn="l">
-              <a:defRPr sz="1315" b="1">
-                <a:solidFill>
-                  <a:srgbClr val="15253A"/>
-                </a:solidFill>
-                <a:latin typeface="Aptos"/>
-                <a:ea typeface="Aptos"/>
-                <a:cs typeface="Aptos"/>
-              </a:defRPr>
-            </a:lvl6pPr>
-            <a:lvl7pPr algn="l">
-              <a:defRPr sz="1315" b="1">
-                <a:solidFill>
-                  <a:srgbClr val="15253A"/>
-                </a:solidFill>
-                <a:latin typeface="Aptos"/>
-                <a:ea typeface="Aptos"/>
-                <a:cs typeface="Aptos"/>
-              </a:defRPr>
-            </a:lvl7pPr>
-            <a:lvl8pPr algn="l">
-              <a:defRPr sz="1315" b="1">
-                <a:solidFill>
-                  <a:srgbClr val="15253A"/>
-                </a:solidFill>
-                <a:latin typeface="Aptos"/>
-                <a:ea typeface="Aptos"/>
-                <a:cs typeface="Aptos"/>
-              </a:defRPr>
-            </a:lvl8pPr>
-            <a:lvl9pPr algn="l">
-              <a:defRPr sz="1315" b="1">
-                <a:solidFill>
-                  <a:srgbClr val="15253A"/>
-                </a:solidFill>
-                <a:latin typeface="Aptos"/>
-                <a:ea typeface="Aptos"/>
-                <a:cs typeface="Aptos"/>
-              </a:defRPr>
-            </a:lvl9pPr>
-          </a:lstStyle>
-          <a:p>
-            <a:pPr algn="l">
-              <a:defRPr sz="1315" b="1">
-                <a:solidFill>
-                  <a:srgbClr val="15253A"/>
-                </a:solidFill>
-                <a:latin typeface="Aptos"/>
-                <a:ea typeface="Aptos"/>
-                <a:cs typeface="Aptos"/>
-              </a:defRPr>
-            </a:pPr>
-            <a:r>
-              <a:rPr sz="1315" b="1">
-                <a:solidFill>
-                  <a:srgbClr val="15253A"/>
-                </a:solidFill>
-                <a:latin typeface="Aptos"/>
-                <a:ea typeface="Aptos"/>
-                <a:cs typeface="Aptos"/>
-              </a:rPr>
-              <a:t>At d/T ≤ 1.0, all 30 keys were recovered; the 1.5 group also reached 30/30.</a:t>
-            </a:r>
-            <a:endParaRPr sz="1315" b="1">
-              <a:solidFill>
-                <a:srgbClr val="15253A"/>
-              </a:solidFill>
-              <a:latin typeface="Aptos"/>
-              <a:ea typeface="Aptos"/>
-              <a:cs typeface="Aptos"/>
-            </a:endParaRPr>
-          </a:p>
-        </p:txBody>
-      </p:sp>
-      <p:sp>
-        <p:nvSpPr>
-          <p:cNvPr id="9" name="矩形 8"/>
-          <p:cNvSpPr>
-            <a:spLocks noGrp="1"/>
-          </p:cNvSpPr>
-          <p:nvPr/>
-        </p:nvSpPr>
-        <p:spPr>
-          <a:xfrm>
-            <a:off x="4305300" y="5241208"/>
-            <a:ext cx="323850" cy="323850"/>
-          </a:xfrm>
-          <a:prstGeom prst="rect">
-            <a:avLst/>
-          </a:prstGeom>
-          <a:noFill/>
-          <a:ln w="0">
-            <a:noFill/>
-            <a:prstDash val="solid"/>
-          </a:ln>
-        </p:spPr>
-        <p:txBody>
-          <a:bodyPr wrap="square" lIns="0" tIns="0" rIns="0" bIns="0" anchor="ctr">
-            <a:normAutofit/>
-          </a:bodyPr>
-          <a:lstStyle>
-            <a:defPPr algn="l">
-              <a:defRPr sz="1725" b="1">
-                <a:solidFill>
-                  <a:srgbClr val="356FC0"/>
-                </a:solidFill>
-                <a:latin typeface="Aptos"/>
-                <a:ea typeface="Aptos"/>
-                <a:cs typeface="Aptos"/>
-              </a:defRPr>
-            </a:defPPr>
-            <a:lvl1pPr algn="l">
-              <a:defRPr sz="1725" b="1">
-                <a:solidFill>
-                  <a:srgbClr val="356FC0"/>
-                </a:solidFill>
-                <a:latin typeface="Aptos"/>
-                <a:ea typeface="Aptos"/>
-                <a:cs typeface="Aptos"/>
-              </a:defRPr>
-            </a:lvl1pPr>
-            <a:lvl2pPr algn="l">
-              <a:defRPr sz="1725" b="1">
-                <a:solidFill>
-                  <a:srgbClr val="356FC0"/>
-                </a:solidFill>
-                <a:latin typeface="Aptos"/>
-                <a:ea typeface="Aptos"/>
-                <a:cs typeface="Aptos"/>
-              </a:defRPr>
-            </a:lvl2pPr>
-            <a:lvl3pPr algn="l">
-              <a:defRPr sz="1725" b="1">
-                <a:solidFill>
-                  <a:srgbClr val="356FC0"/>
-                </a:solidFill>
-                <a:latin typeface="Aptos"/>
-                <a:ea typeface="Aptos"/>
-                <a:cs typeface="Aptos"/>
-              </a:defRPr>
-            </a:lvl3pPr>
-            <a:lvl4pPr algn="l">
-              <a:defRPr sz="1725" b="1">
-                <a:solidFill>
-                  <a:srgbClr val="356FC0"/>
-                </a:solidFill>
-                <a:latin typeface="Aptos"/>
-                <a:ea typeface="Aptos"/>
-                <a:cs typeface="Aptos"/>
-              </a:defRPr>
-            </a:lvl4pPr>
-            <a:lvl5pPr algn="l">
-              <a:defRPr sz="1725" b="1">
-                <a:solidFill>
-                  <a:srgbClr val="356FC0"/>
-                </a:solidFill>
-                <a:latin typeface="Aptos"/>
-                <a:ea typeface="Aptos"/>
-                <a:cs typeface="Aptos"/>
-              </a:defRPr>
-            </a:lvl5pPr>
-            <a:lvl6pPr algn="l">
-              <a:defRPr sz="1725" b="1">
-                <a:solidFill>
-                  <a:srgbClr val="356FC0"/>
-                </a:solidFill>
-                <a:latin typeface="Aptos"/>
-                <a:ea typeface="Aptos"/>
-                <a:cs typeface="Aptos"/>
-              </a:defRPr>
-            </a:lvl6pPr>
-            <a:lvl7pPr algn="l">
-              <a:defRPr sz="1725" b="1">
-                <a:solidFill>
-                  <a:srgbClr val="356FC0"/>
-                </a:solidFill>
-                <a:latin typeface="Aptos"/>
-                <a:ea typeface="Aptos"/>
-                <a:cs typeface="Aptos"/>
-              </a:defRPr>
-            </a:lvl7pPr>
-            <a:lvl8pPr algn="l">
-              <a:defRPr sz="1725" b="1">
-                <a:solidFill>
-                  <a:srgbClr val="356FC0"/>
-                </a:solidFill>
-                <a:latin typeface="Aptos"/>
-                <a:ea typeface="Aptos"/>
-                <a:cs typeface="Aptos"/>
-              </a:defRPr>
-            </a:lvl8pPr>
-            <a:lvl9pPr algn="l">
-              <a:defRPr sz="1725" b="1">
-                <a:solidFill>
-                  <a:srgbClr val="356FC0"/>
-                </a:solidFill>
-                <a:latin typeface="Aptos"/>
-                <a:ea typeface="Aptos"/>
-                <a:cs typeface="Aptos"/>
-              </a:defRPr>
-            </a:lvl9pPr>
-          </a:lstStyle>
-          <a:p>
-            <a:pPr algn="l">
-              <a:defRPr sz="1725" b="1">
-                <a:solidFill>
-                  <a:srgbClr val="356FC0"/>
-                </a:solidFill>
-                <a:latin typeface="Aptos"/>
-                <a:ea typeface="Aptos"/>
-                <a:cs typeface="Aptos"/>
-              </a:defRPr>
-            </a:pPr>
-            <a:r>
-              <a:rPr sz="1725" b="1">
-                <a:solidFill>
-                  <a:srgbClr val="356FC0"/>
-                </a:solidFill>
-                <a:latin typeface="Aptos"/>
-                <a:ea typeface="Aptos"/>
-                <a:cs typeface="Aptos"/>
-              </a:rPr>
-              <a:t>2</a:t>
-            </a:r>
-            <a:endParaRPr sz="1725" b="1">
-              <a:solidFill>
-                <a:srgbClr val="356FC0"/>
-              </a:solidFill>
-              <a:latin typeface="Aptos"/>
-              <a:ea typeface="Aptos"/>
-              <a:cs typeface="Aptos"/>
-            </a:endParaRPr>
-          </a:p>
-        </p:txBody>
-      </p:sp>
-      <p:sp>
-        <p:nvSpPr>
-          <p:cNvPr id="10" name="矩形 9"/>
-          <p:cNvSpPr>
-            <a:spLocks noGrp="1"/>
-          </p:cNvSpPr>
-          <p:nvPr/>
-        </p:nvSpPr>
-        <p:spPr>
-          <a:xfrm>
-            <a:off x="4705350" y="5241208"/>
-            <a:ext cx="3124200" cy="781050"/>
-          </a:xfrm>
-          <a:prstGeom prst="rect">
-            <a:avLst/>
-          </a:prstGeom>
-          <a:noFill/>
-          <a:ln w="0">
-            <a:noFill/>
-            <a:prstDash val="solid"/>
-          </a:ln>
-        </p:spPr>
-        <p:txBody>
-          <a:bodyPr wrap="square" lIns="0" tIns="0" rIns="0" bIns="0" anchor="t">
-            <a:normAutofit lnSpcReduction="10000"/>
-          </a:bodyPr>
-          <a:lstStyle>
-            <a:defPPr algn="l">
-              <a:defRPr sz="1315" b="1">
-                <a:solidFill>
-                  <a:srgbClr val="15253A"/>
-                </a:solidFill>
-                <a:latin typeface="Aptos"/>
-                <a:ea typeface="Aptos"/>
-                <a:cs typeface="Aptos"/>
-              </a:defRPr>
-            </a:defPPr>
-            <a:lvl1pPr algn="l">
-              <a:defRPr sz="1315" b="1">
-                <a:solidFill>
-                  <a:srgbClr val="15253A"/>
-                </a:solidFill>
-                <a:latin typeface="Aptos"/>
-                <a:ea typeface="Aptos"/>
-                <a:cs typeface="Aptos"/>
-              </a:defRPr>
-            </a:lvl1pPr>
-            <a:lvl2pPr algn="l">
-              <a:defRPr sz="1315" b="1">
-                <a:solidFill>
-                  <a:srgbClr val="15253A"/>
-                </a:solidFill>
-                <a:latin typeface="Aptos"/>
-                <a:ea typeface="Aptos"/>
-                <a:cs typeface="Aptos"/>
-              </a:defRPr>
-            </a:lvl2pPr>
-            <a:lvl3pPr algn="l">
-              <a:defRPr sz="1315" b="1">
-                <a:solidFill>
-                  <a:srgbClr val="15253A"/>
-                </a:solidFill>
-                <a:latin typeface="Aptos"/>
-                <a:ea typeface="Aptos"/>
-                <a:cs typeface="Aptos"/>
-              </a:defRPr>
-            </a:lvl3pPr>
-            <a:lvl4pPr algn="l">
-              <a:defRPr sz="1315" b="1">
-                <a:solidFill>
-                  <a:srgbClr val="15253A"/>
-                </a:solidFill>
-                <a:latin typeface="Aptos"/>
-                <a:ea typeface="Aptos"/>
-                <a:cs typeface="Aptos"/>
-              </a:defRPr>
-            </a:lvl4pPr>
-            <a:lvl5pPr algn="l">
-              <a:defRPr sz="1315" b="1">
-                <a:solidFill>
-                  <a:srgbClr val="15253A"/>
-                </a:solidFill>
-                <a:latin typeface="Aptos"/>
-                <a:ea typeface="Aptos"/>
-                <a:cs typeface="Aptos"/>
-              </a:defRPr>
-            </a:lvl5pPr>
-            <a:lvl6pPr algn="l">
-              <a:defRPr sz="1315" b="1">
-                <a:solidFill>
-                  <a:srgbClr val="15253A"/>
-                </a:solidFill>
-                <a:latin typeface="Aptos"/>
-                <a:ea typeface="Aptos"/>
-                <a:cs typeface="Aptos"/>
-              </a:defRPr>
-            </a:lvl6pPr>
-            <a:lvl7pPr algn="l">
-              <a:defRPr sz="1315" b="1">
-                <a:solidFill>
-                  <a:srgbClr val="15253A"/>
-                </a:solidFill>
-                <a:latin typeface="Aptos"/>
-                <a:ea typeface="Aptos"/>
-                <a:cs typeface="Aptos"/>
-              </a:defRPr>
-            </a:lvl7pPr>
-            <a:lvl8pPr algn="l">
-              <a:defRPr sz="1315" b="1">
-                <a:solidFill>
-                  <a:srgbClr val="15253A"/>
-                </a:solidFill>
-                <a:latin typeface="Aptos"/>
-                <a:ea typeface="Aptos"/>
-                <a:cs typeface="Aptos"/>
-              </a:defRPr>
-            </a:lvl8pPr>
-            <a:lvl9pPr algn="l">
-              <a:defRPr sz="1315" b="1">
-                <a:solidFill>
-                  <a:srgbClr val="15253A"/>
-                </a:solidFill>
-                <a:latin typeface="Aptos"/>
-                <a:ea typeface="Aptos"/>
-                <a:cs typeface="Aptos"/>
-              </a:defRPr>
-            </a:lvl9pPr>
-          </a:lstStyle>
-          <a:p>
-            <a:pPr algn="l">
-              <a:defRPr sz="1315" b="1">
-                <a:solidFill>
-                  <a:srgbClr val="15253A"/>
-                </a:solidFill>
-                <a:latin typeface="Aptos"/>
-                <a:ea typeface="Aptos"/>
-                <a:cs typeface="Aptos"/>
-              </a:defRPr>
-            </a:pPr>
-            <a:r>
-              <a:rPr sz="1315" b="1" dirty="0">
-                <a:solidFill>
-                  <a:srgbClr val="15253A"/>
-                </a:solidFill>
-                <a:latin typeface="Aptos"/>
-                <a:ea typeface="Aptos"/>
-                <a:cs typeface="Aptos"/>
-              </a:rPr>
-              <a:t>At d/T = 2.0, recovery fell to 25/30 and declined further at larger ratios.</a:t>
-            </a:r>
-            <a:r>
-              <a:rPr lang="en-US" sz="1315" b="1" dirty="0">
-                <a:solidFill>
-                  <a:srgbClr val="15253A"/>
-                </a:solidFill>
-                <a:latin typeface="Aptos"/>
-                <a:ea typeface="Aptos"/>
-                <a:cs typeface="Aptos"/>
-              </a:rPr>
-              <a:t> </a:t>
-            </a:r>
-            <a:endParaRPr lang="en-US" sz="1315" b="1" dirty="0">
-              <a:solidFill>
-                <a:srgbClr val="15253A"/>
-              </a:solidFill>
-              <a:latin typeface="Aptos"/>
-              <a:ea typeface="Aptos"/>
-              <a:cs typeface="Aptos"/>
-            </a:endParaRPr>
-          </a:p>
-          <a:p>
-            <a:pPr algn="l">
-              <a:defRPr sz="1315" b="1">
-                <a:solidFill>
-                  <a:srgbClr val="15253A"/>
-                </a:solidFill>
-                <a:latin typeface="Aptos"/>
-                <a:ea typeface="Aptos"/>
-                <a:cs typeface="Aptos"/>
-              </a:defRPr>
-            </a:pPr>
-            <a:r>
-              <a:rPr lang="en-US" sz="1315" b="1" dirty="0">
-                <a:solidFill>
-                  <a:srgbClr val="15253A"/>
-                </a:solidFill>
-                <a:latin typeface="Aptos"/>
-                <a:ea typeface="Aptos"/>
-                <a:cs typeface="Aptos"/>
-              </a:rPr>
-              <a:t>Success remained possible, but no longer guaranteed.</a:t>
-            </a:r>
-            <a:endParaRPr lang="en-US" sz="1315" b="1" dirty="0">
-              <a:solidFill>
-                <a:srgbClr val="15253A"/>
-              </a:solidFill>
-              <a:latin typeface="Aptos"/>
-              <a:ea typeface="Aptos"/>
-              <a:cs typeface="Aptos"/>
-            </a:endParaRPr>
-          </a:p>
-        </p:txBody>
-      </p:sp>
-      <p:sp>
-        <p:nvSpPr>
-          <p:cNvPr id="11" name="矩形 10"/>
-          <p:cNvSpPr>
-            <a:spLocks noGrp="1"/>
-          </p:cNvSpPr>
-          <p:nvPr/>
-        </p:nvSpPr>
-        <p:spPr>
-          <a:xfrm>
-            <a:off x="8096250" y="5241208"/>
-            <a:ext cx="323850" cy="323850"/>
-          </a:xfrm>
-          <a:prstGeom prst="rect">
-            <a:avLst/>
-          </a:prstGeom>
-          <a:noFill/>
-          <a:ln w="0">
-            <a:noFill/>
-            <a:prstDash val="solid"/>
-          </a:ln>
-        </p:spPr>
-        <p:txBody>
-          <a:bodyPr wrap="square" lIns="0" tIns="0" rIns="0" bIns="0" anchor="ctr">
-            <a:normAutofit/>
-          </a:bodyPr>
-          <a:lstStyle>
-            <a:defPPr algn="l">
-              <a:defRPr sz="1725" b="1">
-                <a:solidFill>
-                  <a:srgbClr val="356FC0"/>
-                </a:solidFill>
-                <a:latin typeface="Aptos"/>
-                <a:ea typeface="Aptos"/>
-                <a:cs typeface="Aptos"/>
-              </a:defRPr>
-            </a:defPPr>
-            <a:lvl1pPr algn="l">
-              <a:defRPr sz="1725" b="1">
-                <a:solidFill>
-                  <a:srgbClr val="356FC0"/>
-                </a:solidFill>
-                <a:latin typeface="Aptos"/>
-                <a:ea typeface="Aptos"/>
-                <a:cs typeface="Aptos"/>
-              </a:defRPr>
-            </a:lvl1pPr>
-            <a:lvl2pPr algn="l">
-              <a:defRPr sz="1725" b="1">
-                <a:solidFill>
-                  <a:srgbClr val="356FC0"/>
-                </a:solidFill>
-                <a:latin typeface="Aptos"/>
-                <a:ea typeface="Aptos"/>
-                <a:cs typeface="Aptos"/>
-              </a:defRPr>
-            </a:lvl2pPr>
-            <a:lvl3pPr algn="l">
-              <a:defRPr sz="1725" b="1">
-                <a:solidFill>
-                  <a:srgbClr val="356FC0"/>
-                </a:solidFill>
-                <a:latin typeface="Aptos"/>
-                <a:ea typeface="Aptos"/>
-                <a:cs typeface="Aptos"/>
-              </a:defRPr>
-            </a:lvl3pPr>
-            <a:lvl4pPr algn="l">
-              <a:defRPr sz="1725" b="1">
-                <a:solidFill>
-                  <a:srgbClr val="356FC0"/>
-                </a:solidFill>
-                <a:latin typeface="Aptos"/>
-                <a:ea typeface="Aptos"/>
-                <a:cs typeface="Aptos"/>
-              </a:defRPr>
-            </a:lvl4pPr>
-            <a:lvl5pPr algn="l">
-              <a:defRPr sz="1725" b="1">
-                <a:solidFill>
-                  <a:srgbClr val="356FC0"/>
-                </a:solidFill>
-                <a:latin typeface="Aptos"/>
-                <a:ea typeface="Aptos"/>
-                <a:cs typeface="Aptos"/>
-              </a:defRPr>
-            </a:lvl5pPr>
-            <a:lvl6pPr algn="l">
-              <a:defRPr sz="1725" b="1">
-                <a:solidFill>
-                  <a:srgbClr val="356FC0"/>
-                </a:solidFill>
-                <a:latin typeface="Aptos"/>
-                <a:ea typeface="Aptos"/>
-                <a:cs typeface="Aptos"/>
-              </a:defRPr>
-            </a:lvl6pPr>
-            <a:lvl7pPr algn="l">
-              <a:defRPr sz="1725" b="1">
-                <a:solidFill>
-                  <a:srgbClr val="356FC0"/>
-                </a:solidFill>
-                <a:latin typeface="Aptos"/>
-                <a:ea typeface="Aptos"/>
-                <a:cs typeface="Aptos"/>
-              </a:defRPr>
-            </a:lvl7pPr>
-            <a:lvl8pPr algn="l">
-              <a:defRPr sz="1725" b="1">
-                <a:solidFill>
-                  <a:srgbClr val="356FC0"/>
-                </a:solidFill>
-                <a:latin typeface="Aptos"/>
-                <a:ea typeface="Aptos"/>
-                <a:cs typeface="Aptos"/>
-              </a:defRPr>
-            </a:lvl8pPr>
-            <a:lvl9pPr algn="l">
-              <a:defRPr sz="1725" b="1">
-                <a:solidFill>
-                  <a:srgbClr val="356FC0"/>
-                </a:solidFill>
-                <a:latin typeface="Aptos"/>
-                <a:ea typeface="Aptos"/>
-                <a:cs typeface="Aptos"/>
-              </a:defRPr>
-            </a:lvl9pPr>
-          </a:lstStyle>
-          <a:p>
-            <a:pPr algn="l">
-              <a:defRPr sz="1725" b="1">
-                <a:solidFill>
-                  <a:srgbClr val="356FC0"/>
-                </a:solidFill>
-                <a:latin typeface="Aptos"/>
-                <a:ea typeface="Aptos"/>
-                <a:cs typeface="Aptos"/>
-              </a:defRPr>
-            </a:pPr>
-            <a:r>
-              <a:rPr sz="1725" b="1">
-                <a:solidFill>
-                  <a:srgbClr val="356FC0"/>
-                </a:solidFill>
-                <a:latin typeface="Aptos"/>
-                <a:ea typeface="Aptos"/>
-                <a:cs typeface="Aptos"/>
-              </a:rPr>
-              <a:t>3</a:t>
-            </a:r>
-            <a:endParaRPr sz="1725" b="1">
-              <a:solidFill>
-                <a:srgbClr val="356FC0"/>
-              </a:solidFill>
-              <a:latin typeface="Aptos"/>
-              <a:ea typeface="Aptos"/>
-              <a:cs typeface="Aptos"/>
-            </a:endParaRPr>
-          </a:p>
-        </p:txBody>
-      </p:sp>
-      <p:sp>
-        <p:nvSpPr>
-          <p:cNvPr id="12" name="矩形 11"/>
-          <p:cNvSpPr>
-            <a:spLocks noGrp="1"/>
-          </p:cNvSpPr>
-          <p:nvPr/>
-        </p:nvSpPr>
-        <p:spPr>
-          <a:xfrm>
-            <a:off x="8496300" y="5241208"/>
-            <a:ext cx="3124200" cy="781050"/>
-          </a:xfrm>
-          <a:prstGeom prst="rect">
-            <a:avLst/>
-          </a:prstGeom>
-          <a:noFill/>
-          <a:ln w="0">
-            <a:noFill/>
-            <a:prstDash val="solid"/>
-          </a:ln>
-        </p:spPr>
-        <p:txBody>
-          <a:bodyPr wrap="square" lIns="0" tIns="0" rIns="0" bIns="0" anchor="t">
-            <a:normAutofit fontScale="92500"/>
-          </a:bodyPr>
-          <a:lstStyle>
-            <a:defPPr algn="l">
-              <a:defRPr sz="1315" b="1">
-                <a:solidFill>
-                  <a:srgbClr val="15253A"/>
-                </a:solidFill>
-                <a:latin typeface="Aptos"/>
-                <a:ea typeface="Aptos"/>
-                <a:cs typeface="Aptos"/>
-              </a:defRPr>
-            </a:defPPr>
-            <a:lvl1pPr algn="l">
-              <a:defRPr sz="1315" b="1">
-                <a:solidFill>
-                  <a:srgbClr val="15253A"/>
-                </a:solidFill>
-                <a:latin typeface="Aptos"/>
-                <a:ea typeface="Aptos"/>
-                <a:cs typeface="Aptos"/>
-              </a:defRPr>
-            </a:lvl1pPr>
-            <a:lvl2pPr algn="l">
-              <a:defRPr sz="1315" b="1">
-                <a:solidFill>
-                  <a:srgbClr val="15253A"/>
-                </a:solidFill>
-                <a:latin typeface="Aptos"/>
-                <a:ea typeface="Aptos"/>
-                <a:cs typeface="Aptos"/>
-              </a:defRPr>
-            </a:lvl2pPr>
-            <a:lvl3pPr algn="l">
-              <a:defRPr sz="1315" b="1">
-                <a:solidFill>
-                  <a:srgbClr val="15253A"/>
-                </a:solidFill>
-                <a:latin typeface="Aptos"/>
-                <a:ea typeface="Aptos"/>
-                <a:cs typeface="Aptos"/>
-              </a:defRPr>
-            </a:lvl3pPr>
-            <a:lvl4pPr algn="l">
-              <a:defRPr sz="1315" b="1">
-                <a:solidFill>
-                  <a:srgbClr val="15253A"/>
-                </a:solidFill>
-                <a:latin typeface="Aptos"/>
-                <a:ea typeface="Aptos"/>
-                <a:cs typeface="Aptos"/>
-              </a:defRPr>
-            </a:lvl4pPr>
-            <a:lvl5pPr algn="l">
-              <a:defRPr sz="1315" b="1">
-                <a:solidFill>
-                  <a:srgbClr val="15253A"/>
-                </a:solidFill>
-                <a:latin typeface="Aptos"/>
-                <a:ea typeface="Aptos"/>
-                <a:cs typeface="Aptos"/>
-              </a:defRPr>
-            </a:lvl5pPr>
-            <a:lvl6pPr algn="l">
-              <a:defRPr sz="1315" b="1">
-                <a:solidFill>
-                  <a:srgbClr val="15253A"/>
-                </a:solidFill>
-                <a:latin typeface="Aptos"/>
-                <a:ea typeface="Aptos"/>
-                <a:cs typeface="Aptos"/>
-              </a:defRPr>
-            </a:lvl6pPr>
-            <a:lvl7pPr algn="l">
-              <a:defRPr sz="1315" b="1">
-                <a:solidFill>
-                  <a:srgbClr val="15253A"/>
-                </a:solidFill>
-                <a:latin typeface="Aptos"/>
-                <a:ea typeface="Aptos"/>
-                <a:cs typeface="Aptos"/>
-              </a:defRPr>
-            </a:lvl7pPr>
-            <a:lvl8pPr algn="l">
-              <a:defRPr sz="1315" b="1">
-                <a:solidFill>
-                  <a:srgbClr val="15253A"/>
-                </a:solidFill>
-                <a:latin typeface="Aptos"/>
-                <a:ea typeface="Aptos"/>
-                <a:cs typeface="Aptos"/>
-              </a:defRPr>
-            </a:lvl8pPr>
-            <a:lvl9pPr algn="l">
-              <a:defRPr sz="1315" b="1">
-                <a:solidFill>
-                  <a:srgbClr val="15253A"/>
-                </a:solidFill>
-                <a:latin typeface="Aptos"/>
-                <a:ea typeface="Aptos"/>
-                <a:cs typeface="Aptos"/>
-              </a:defRPr>
-            </a:lvl9pPr>
-          </a:lstStyle>
-          <a:p>
-            <a:pPr algn="l">
-              <a:defRPr sz="1315" b="1">
-                <a:solidFill>
-                  <a:srgbClr val="15253A"/>
-                </a:solidFill>
-                <a:latin typeface="Aptos"/>
-                <a:ea typeface="Aptos"/>
-                <a:cs typeface="Aptos"/>
-              </a:defRPr>
-            </a:pPr>
-            <a:r>
-              <a:rPr sz="1315" b="1" dirty="0">
-                <a:solidFill>
-                  <a:srgbClr val="15253A"/>
-                </a:solidFill>
-                <a:latin typeface="Aptos"/>
-                <a:ea typeface="Aptos"/>
-                <a:cs typeface="Aptos"/>
-              </a:rPr>
-              <a:t>All 2048-bit weak keys were recovered; median attack time was 4.23 </a:t>
-            </a:r>
-            <a:r>
-              <a:rPr sz="1315" b="1" dirty="0" err="1">
-                <a:solidFill>
-                  <a:srgbClr val="15253A"/>
-                </a:solidFill>
-                <a:latin typeface="Aptos"/>
-                <a:ea typeface="Aptos"/>
-                <a:cs typeface="Aptos"/>
-              </a:rPr>
-              <a:t>ms.</a:t>
-            </a:r>
-            <a:r>
-              <a:rPr lang="en-US" sz="1315" b="1" dirty="0">
-                <a:solidFill>
-                  <a:srgbClr val="15253A"/>
-                </a:solidFill>
-                <a:latin typeface="Aptos"/>
-                <a:ea typeface="Aptos"/>
-                <a:cs typeface="Aptos"/>
-              </a:rPr>
-              <a:t> </a:t>
-            </a:r>
-            <a:endParaRPr lang="en-US" sz="1315" b="1" dirty="0">
-              <a:solidFill>
-                <a:srgbClr val="15253A"/>
-              </a:solidFill>
-              <a:latin typeface="Aptos"/>
-              <a:ea typeface="Aptos"/>
-              <a:cs typeface="Aptos"/>
-            </a:endParaRPr>
-          </a:p>
-          <a:p>
-            <a:pPr algn="l">
-              <a:defRPr sz="1315" b="1">
-                <a:solidFill>
-                  <a:srgbClr val="15253A"/>
-                </a:solidFill>
-                <a:latin typeface="Aptos"/>
-                <a:ea typeface="Aptos"/>
-                <a:cs typeface="Aptos"/>
-              </a:defRPr>
-            </a:pPr>
-            <a:r>
-              <a:rPr lang="en-US" sz="1315" b="1" dirty="0">
-                <a:solidFill>
-                  <a:srgbClr val="15253A"/>
-                </a:solidFill>
-                <a:latin typeface="Aptos"/>
-                <a:ea typeface="Aptos"/>
-                <a:cs typeface="Aptos"/>
-              </a:rPr>
-              <a:t>Increasing n to 2048 bits did not remove the vulnerability when d remained too small.</a:t>
-            </a:r>
-            <a:endParaRPr lang="en-US" sz="1315" b="1" dirty="0">
-              <a:solidFill>
-                <a:srgbClr val="15253A"/>
-              </a:solidFill>
-              <a:latin typeface="Aptos"/>
-              <a:ea typeface="Aptos"/>
-              <a:cs typeface="Aptos"/>
-            </a:endParaRPr>
-          </a:p>
-          <a:p>
-            <a:pPr algn="l">
-              <a:defRPr sz="1315" b="1">
-                <a:solidFill>
-                  <a:srgbClr val="15253A"/>
-                </a:solidFill>
-                <a:latin typeface="Aptos"/>
-                <a:ea typeface="Aptos"/>
-                <a:cs typeface="Aptos"/>
-              </a:defRPr>
-            </a:pPr>
-            <a:endParaRPr sz="1315" b="1" dirty="0">
-              <a:solidFill>
-                <a:srgbClr val="15253A"/>
-              </a:solidFill>
-              <a:latin typeface="Aptos"/>
-              <a:ea typeface="Aptos"/>
-              <a:cs typeface="Aptos"/>
-            </a:endParaRPr>
-          </a:p>
-        </p:txBody>
-      </p:sp>
-      <p:sp>
-        <p:nvSpPr>
           <p:cNvPr id="13" name="矩形 12"/>
           <p:cNvSpPr>
             <a:spLocks noGrp="1"/>
@@ -18394,7 +17283,7 @@
         </p:blipFill>
         <p:spPr>
           <a:xfrm>
-            <a:off x="692150" y="955675"/>
+            <a:off x="196850" y="1603375"/>
             <a:ext cx="6399530" cy="3999865"/>
           </a:xfrm>
           <a:prstGeom prst="rect">
@@ -22281,167 +21170,6 @@
             <a:endParaRPr sz="1350" b="0" dirty="0">
               <a:solidFill>
                 <a:srgbClr val="15253A"/>
-              </a:solidFill>
-              <a:latin typeface="Aptos"/>
-              <a:ea typeface="Aptos"/>
-              <a:cs typeface="Aptos"/>
-            </a:endParaRPr>
-          </a:p>
-        </p:txBody>
-      </p:sp>
-      <p:sp>
-        <p:nvSpPr>
-          <p:cNvPr id="22" name="矩形 21"/>
-          <p:cNvSpPr>
-            <a:spLocks noGrp="1"/>
-          </p:cNvSpPr>
-          <p:nvPr/>
-        </p:nvSpPr>
-        <p:spPr>
-          <a:xfrm>
-            <a:off x="723900" y="5715000"/>
-            <a:ext cx="10572750" cy="381000"/>
-          </a:xfrm>
-          <a:prstGeom prst="rect">
-            <a:avLst/>
-          </a:prstGeom>
-          <a:noFill/>
-          <a:ln w="0">
-            <a:noFill/>
-            <a:prstDash val="solid"/>
-          </a:ln>
-        </p:spPr>
-        <p:txBody>
-          <a:bodyPr wrap="square" lIns="0" tIns="0" rIns="0" bIns="0" anchor="ctr">
-            <a:normAutofit/>
-          </a:bodyPr>
-          <a:lstStyle>
-            <a:defPPr algn="l">
-              <a:defRPr sz="1275" b="0">
-                <a:solidFill>
-                  <a:srgbClr val="5D6B7C"/>
-                </a:solidFill>
-                <a:latin typeface="Aptos"/>
-                <a:ea typeface="Aptos"/>
-                <a:cs typeface="Aptos"/>
-              </a:defRPr>
-            </a:defPPr>
-            <a:lvl1pPr algn="l">
-              <a:defRPr sz="1275" b="0">
-                <a:solidFill>
-                  <a:srgbClr val="5D6B7C"/>
-                </a:solidFill>
-                <a:latin typeface="Aptos"/>
-                <a:ea typeface="Aptos"/>
-                <a:cs typeface="Aptos"/>
-              </a:defRPr>
-            </a:lvl1pPr>
-            <a:lvl2pPr algn="l">
-              <a:defRPr sz="1275" b="0">
-                <a:solidFill>
-                  <a:srgbClr val="5D6B7C"/>
-                </a:solidFill>
-                <a:latin typeface="Aptos"/>
-                <a:ea typeface="Aptos"/>
-                <a:cs typeface="Aptos"/>
-              </a:defRPr>
-            </a:lvl2pPr>
-            <a:lvl3pPr algn="l">
-              <a:defRPr sz="1275" b="0">
-                <a:solidFill>
-                  <a:srgbClr val="5D6B7C"/>
-                </a:solidFill>
-                <a:latin typeface="Aptos"/>
-                <a:ea typeface="Aptos"/>
-                <a:cs typeface="Aptos"/>
-              </a:defRPr>
-            </a:lvl3pPr>
-            <a:lvl4pPr algn="l">
-              <a:defRPr sz="1275" b="0">
-                <a:solidFill>
-                  <a:srgbClr val="5D6B7C"/>
-                </a:solidFill>
-                <a:latin typeface="Aptos"/>
-                <a:ea typeface="Aptos"/>
-                <a:cs typeface="Aptos"/>
-              </a:defRPr>
-            </a:lvl4pPr>
-            <a:lvl5pPr algn="l">
-              <a:defRPr sz="1275" b="0">
-                <a:solidFill>
-                  <a:srgbClr val="5D6B7C"/>
-                </a:solidFill>
-                <a:latin typeface="Aptos"/>
-                <a:ea typeface="Aptos"/>
-                <a:cs typeface="Aptos"/>
-              </a:defRPr>
-            </a:lvl5pPr>
-            <a:lvl6pPr algn="l">
-              <a:defRPr sz="1275" b="0">
-                <a:solidFill>
-                  <a:srgbClr val="5D6B7C"/>
-                </a:solidFill>
-                <a:latin typeface="Aptos"/>
-                <a:ea typeface="Aptos"/>
-                <a:cs typeface="Aptos"/>
-              </a:defRPr>
-            </a:lvl6pPr>
-            <a:lvl7pPr algn="l">
-              <a:defRPr sz="1275" b="0">
-                <a:solidFill>
-                  <a:srgbClr val="5D6B7C"/>
-                </a:solidFill>
-                <a:latin typeface="Aptos"/>
-                <a:ea typeface="Aptos"/>
-                <a:cs typeface="Aptos"/>
-              </a:defRPr>
-            </a:lvl7pPr>
-            <a:lvl8pPr algn="l">
-              <a:defRPr sz="1275" b="0">
-                <a:solidFill>
-                  <a:srgbClr val="5D6B7C"/>
-                </a:solidFill>
-                <a:latin typeface="Aptos"/>
-                <a:ea typeface="Aptos"/>
-                <a:cs typeface="Aptos"/>
-              </a:defRPr>
-            </a:lvl8pPr>
-            <a:lvl9pPr algn="l">
-              <a:defRPr sz="1275" b="0">
-                <a:solidFill>
-                  <a:srgbClr val="5D6B7C"/>
-                </a:solidFill>
-                <a:latin typeface="Aptos"/>
-                <a:ea typeface="Aptos"/>
-                <a:cs typeface="Aptos"/>
-              </a:defRPr>
-            </a:lvl9pPr>
-          </a:lstStyle>
-          <a:p>
-            <a:pPr algn="l">
-              <a:defRPr sz="1275" b="0">
-                <a:solidFill>
-                  <a:srgbClr val="5D6B7C"/>
-                </a:solidFill>
-                <a:latin typeface="Aptos"/>
-                <a:ea typeface="Aptos"/>
-                <a:cs typeface="Aptos"/>
-              </a:defRPr>
-            </a:pPr>
-            <a:r>
-              <a:rPr sz="1275" b="0">
-                <a:solidFill>
-                  <a:srgbClr val="5D6B7C"/>
-                </a:solidFill>
-                <a:latin typeface="Aptos"/>
-                <a:ea typeface="Aptos"/>
-                <a:cs typeface="Aptos"/>
-              </a:rPr>
-              <a:t>Prime generation, gcd, modular inverse and isqrt use existing libraries or Python standard-library functions.</a:t>
-            </a:r>
-            <a:endParaRPr sz="1275" b="0">
-              <a:solidFill>
-                <a:srgbClr val="5D6B7C"/>
               </a:solidFill>
               <a:latin typeface="Aptos"/>
               <a:ea typeface="Aptos"/>

--- a/docs/RSA_Wiener_Attack_EN.pptx
+++ b/docs/RSA_Wiener_Attack_EN.pptx
@@ -3510,9 +3510,7 @@
   <p:cSld>
     <p:bg>
       <p:bgPr>
-        <a:solidFill>
-          <a:srgbClr val="0D1C2E"/>
-        </a:solidFill>
+        <a:noFill/>
         <a:effectLst/>
       </p:bgPr>
     </p:bg>
@@ -3532,167 +3530,6 @@
       </p:grpSpPr>
       <p:sp>
         <p:nvSpPr>
-          <p:cNvPr id="8" name="矩形 7"/>
-          <p:cNvSpPr>
-            <a:spLocks noGrp="1"/>
-          </p:cNvSpPr>
-          <p:nvPr/>
-        </p:nvSpPr>
-        <p:spPr>
-          <a:xfrm>
-            <a:off x="800100" y="781050"/>
-            <a:ext cx="9906000" cy="323850"/>
-          </a:xfrm>
-          <a:prstGeom prst="rect">
-            <a:avLst/>
-          </a:prstGeom>
-          <a:noFill/>
-          <a:ln w="0">
-            <a:noFill/>
-            <a:prstDash val="solid"/>
-          </a:ln>
-        </p:spPr>
-        <p:txBody>
-          <a:bodyPr wrap="square" lIns="0" tIns="0" rIns="0" bIns="0" anchor="t">
-            <a:normAutofit/>
-          </a:bodyPr>
-          <a:lstStyle>
-            <a:defPPr algn="l">
-              <a:defRPr sz="1350" b="1">
-                <a:solidFill>
-                  <a:srgbClr val="9BB5D1"/>
-                </a:solidFill>
-                <a:latin typeface="Aptos"/>
-                <a:ea typeface="Aptos"/>
-                <a:cs typeface="Aptos"/>
-              </a:defRPr>
-            </a:defPPr>
-            <a:lvl1pPr algn="l">
-              <a:defRPr sz="1350" b="1">
-                <a:solidFill>
-                  <a:srgbClr val="9BB5D1"/>
-                </a:solidFill>
-                <a:latin typeface="Aptos"/>
-                <a:ea typeface="Aptos"/>
-                <a:cs typeface="Aptos"/>
-              </a:defRPr>
-            </a:lvl1pPr>
-            <a:lvl2pPr algn="l">
-              <a:defRPr sz="1350" b="1">
-                <a:solidFill>
-                  <a:srgbClr val="9BB5D1"/>
-                </a:solidFill>
-                <a:latin typeface="Aptos"/>
-                <a:ea typeface="Aptos"/>
-                <a:cs typeface="Aptos"/>
-              </a:defRPr>
-            </a:lvl2pPr>
-            <a:lvl3pPr algn="l">
-              <a:defRPr sz="1350" b="1">
-                <a:solidFill>
-                  <a:srgbClr val="9BB5D1"/>
-                </a:solidFill>
-                <a:latin typeface="Aptos"/>
-                <a:ea typeface="Aptos"/>
-                <a:cs typeface="Aptos"/>
-              </a:defRPr>
-            </a:lvl3pPr>
-            <a:lvl4pPr algn="l">
-              <a:defRPr sz="1350" b="1">
-                <a:solidFill>
-                  <a:srgbClr val="9BB5D1"/>
-                </a:solidFill>
-                <a:latin typeface="Aptos"/>
-                <a:ea typeface="Aptos"/>
-                <a:cs typeface="Aptos"/>
-              </a:defRPr>
-            </a:lvl4pPr>
-            <a:lvl5pPr algn="l">
-              <a:defRPr sz="1350" b="1">
-                <a:solidFill>
-                  <a:srgbClr val="9BB5D1"/>
-                </a:solidFill>
-                <a:latin typeface="Aptos"/>
-                <a:ea typeface="Aptos"/>
-                <a:cs typeface="Aptos"/>
-              </a:defRPr>
-            </a:lvl5pPr>
-            <a:lvl6pPr algn="l">
-              <a:defRPr sz="1350" b="1">
-                <a:solidFill>
-                  <a:srgbClr val="9BB5D1"/>
-                </a:solidFill>
-                <a:latin typeface="Aptos"/>
-                <a:ea typeface="Aptos"/>
-                <a:cs typeface="Aptos"/>
-              </a:defRPr>
-            </a:lvl6pPr>
-            <a:lvl7pPr algn="l">
-              <a:defRPr sz="1350" b="1">
-                <a:solidFill>
-                  <a:srgbClr val="9BB5D1"/>
-                </a:solidFill>
-                <a:latin typeface="Aptos"/>
-                <a:ea typeface="Aptos"/>
-                <a:cs typeface="Aptos"/>
-              </a:defRPr>
-            </a:lvl7pPr>
-            <a:lvl8pPr algn="l">
-              <a:defRPr sz="1350" b="1">
-                <a:solidFill>
-                  <a:srgbClr val="9BB5D1"/>
-                </a:solidFill>
-                <a:latin typeface="Aptos"/>
-                <a:ea typeface="Aptos"/>
-                <a:cs typeface="Aptos"/>
-              </a:defRPr>
-            </a:lvl8pPr>
-            <a:lvl9pPr algn="l">
-              <a:defRPr sz="1350" b="1">
-                <a:solidFill>
-                  <a:srgbClr val="9BB5D1"/>
-                </a:solidFill>
-                <a:latin typeface="Aptos"/>
-                <a:ea typeface="Aptos"/>
-                <a:cs typeface="Aptos"/>
-              </a:defRPr>
-            </a:lvl9pPr>
-          </a:lstStyle>
-          <a:p>
-            <a:pPr algn="l">
-              <a:defRPr sz="1350" b="1">
-                <a:solidFill>
-                  <a:srgbClr val="9BB5D1"/>
-                </a:solidFill>
-                <a:latin typeface="Aptos"/>
-                <a:ea typeface="Aptos"/>
-                <a:cs typeface="Aptos"/>
-              </a:defRPr>
-            </a:pPr>
-            <a:r>
-              <a:rPr sz="1350" b="1">
-                <a:solidFill>
-                  <a:srgbClr val="9BB5D1"/>
-                </a:solidFill>
-                <a:latin typeface="Aptos"/>
-                <a:ea typeface="Aptos"/>
-                <a:cs typeface="Aptos"/>
-              </a:rPr>
-              <a:t>INTRODUCTION TO CRYPTOGRAPHY  /  COURSE PROJECT</a:t>
-            </a:r>
-            <a:endParaRPr sz="1350" b="1">
-              <a:solidFill>
-                <a:srgbClr val="9BB5D1"/>
-              </a:solidFill>
-              <a:latin typeface="Aptos"/>
-              <a:ea typeface="Aptos"/>
-              <a:cs typeface="Aptos"/>
-            </a:endParaRPr>
-          </a:p>
-        </p:txBody>
-      </p:sp>
-      <p:sp>
-        <p:nvSpPr>
           <p:cNvPr id="2" name="矩形 1"/>
           <p:cNvSpPr>
             <a:spLocks noGrp="1"/>
@@ -3701,7 +3538,7 @@
         </p:nvSpPr>
         <p:spPr>
           <a:xfrm>
-            <a:off x="762000" y="1809750"/>
+            <a:off x="762000" y="1513840"/>
             <a:ext cx="10477500" cy="819150"/>
           </a:xfrm>
           <a:prstGeom prst="rect">
@@ -3833,7 +3670,7 @@
             <a:r>
               <a:rPr sz="5100" b="1">
                 <a:solidFill>
-                  <a:srgbClr val="FFFFFF"/>
+                  <a:schemeClr val="tx1"/>
                 </a:solidFill>
                 <a:latin typeface="Aptos"/>
                 <a:ea typeface="Aptos"/>
@@ -3843,7 +3680,7 @@
             </a:r>
             <a:endParaRPr sz="5100" b="1">
               <a:solidFill>
-                <a:srgbClr val="FFFFFF"/>
+                <a:schemeClr val="tx1"/>
               </a:solidFill>
               <a:latin typeface="Aptos"/>
               <a:ea typeface="Aptos"/>
@@ -3862,7 +3699,7 @@
         </p:nvSpPr>
         <p:spPr>
           <a:xfrm>
-            <a:off x="800100" y="2743200"/>
+            <a:off x="800100" y="2447290"/>
             <a:ext cx="10001250" cy="552450"/>
           </a:xfrm>
           <a:prstGeom prst="rect">
@@ -3994,7 +3831,7 @@
             <a:r>
               <a:rPr sz="2550" b="1">
                 <a:solidFill>
-                  <a:srgbClr val="DCE6F0"/>
+                  <a:schemeClr val="accent1"/>
                 </a:solidFill>
                 <a:latin typeface="Aptos"/>
                 <a:ea typeface="Aptos"/>
@@ -4004,7 +3841,7 @@
             </a:r>
             <a:endParaRPr sz="2550" b="1">
               <a:solidFill>
-                <a:srgbClr val="DCE6F0"/>
+                <a:schemeClr val="accent1"/>
               </a:solidFill>
               <a:latin typeface="Aptos"/>
               <a:ea typeface="Aptos"/>
@@ -4023,7 +3860,7 @@
         </p:nvSpPr>
         <p:spPr>
           <a:xfrm>
-            <a:off x="819150" y="3524250"/>
+            <a:off x="819150" y="3228340"/>
             <a:ext cx="10096500" cy="457200"/>
           </a:xfrm>
           <a:prstGeom prst="rect">
@@ -4155,7 +3992,7 @@
             <a:r>
               <a:rPr sz="1875" b="0">
                 <a:solidFill>
-                  <a:srgbClr val="D0D9E4"/>
+                  <a:schemeClr val="tx1"/>
                 </a:solidFill>
                 <a:latin typeface="Aptos"/>
                 <a:ea typeface="Aptos"/>
@@ -4165,7 +4002,7 @@
             </a:r>
             <a:endParaRPr sz="1875" b="0">
               <a:solidFill>
-                <a:srgbClr val="D0D9E4"/>
+                <a:schemeClr val="tx1"/>
               </a:solidFill>
               <a:latin typeface="Aptos"/>
               <a:ea typeface="Aptos"/>
@@ -4184,7 +4021,7 @@
         </p:nvSpPr>
         <p:spPr>
           <a:xfrm>
-            <a:off x="819150" y="5829300"/>
+            <a:off x="819150" y="5533390"/>
             <a:ext cx="6667500" cy="304800"/>
           </a:xfrm>
           <a:prstGeom prst="rect">
@@ -4316,7 +4153,7 @@
             <a:r>
               <a:rPr sz="1575" b="0" dirty="0">
                 <a:solidFill>
-                  <a:srgbClr val="D0D9E4"/>
+                  <a:schemeClr val="tx1"/>
                 </a:solidFill>
                 <a:latin typeface="Aptos"/>
                 <a:ea typeface="Aptos"/>
@@ -4327,7 +4164,7 @@
             <a:r>
               <a:rPr lang="en-US" altLang="zh-CN" sz="1575" b="0" dirty="0">
                 <a:solidFill>
-                  <a:srgbClr val="D0D9E4"/>
+                  <a:schemeClr val="tx1"/>
                 </a:solidFill>
                 <a:latin typeface="Aptos"/>
                 <a:ea typeface="Aptos"/>
@@ -4338,7 +4175,7 @@
             <a:r>
               <a:rPr lang="en-US" altLang="zh-CN" sz="1575" b="0" dirty="0" err="1">
                 <a:solidFill>
-                  <a:srgbClr val="D0D9E4"/>
+                  <a:schemeClr val="tx1"/>
                 </a:solidFill>
                 <a:latin typeface="Aptos"/>
                 <a:ea typeface="Aptos"/>
@@ -4346,9 +4183,9 @@
               </a:rPr>
               <a:t>Bingyi</a:t>
             </a:r>
-            <a:endParaRPr sz="1575" b="0" dirty="0">
+            <a:endParaRPr lang="en-US" altLang="zh-CN" sz="1575" b="0" dirty="0" err="1">
               <a:solidFill>
-                <a:srgbClr val="D0D9E4"/>
+                <a:schemeClr val="tx1"/>
               </a:solidFill>
               <a:latin typeface="Aptos"/>
               <a:ea typeface="Aptos"/>
@@ -4367,7 +4204,7 @@
         </p:nvSpPr>
         <p:spPr>
           <a:xfrm>
-            <a:off x="10001250" y="5829300"/>
+            <a:off x="10001250" y="5533390"/>
             <a:ext cx="1524000" cy="304800"/>
           </a:xfrm>
           <a:prstGeom prst="rect">
@@ -4499,17 +4336,28 @@
             <a:r>
               <a:rPr sz="1425" b="0">
                 <a:solidFill>
-                  <a:srgbClr val="D0D9E4"/>
+                  <a:schemeClr val="tx1"/>
                 </a:solidFill>
                 <a:latin typeface="Aptos"/>
                 <a:ea typeface="Aptos"/>
                 <a:cs typeface="Aptos"/>
               </a:rPr>
-              <a:t>2026-10-18</a:t>
+              <a:t>2026-10-1</a:t>
             </a:r>
-            <a:endParaRPr sz="1425" b="0">
+            <a:r>
+              <a:rPr lang="en-US" sz="1425" b="0">
+                <a:solidFill>
+                  <a:schemeClr val="tx1"/>
+                </a:solidFill>
+                <a:latin typeface="Aptos"/>
+                <a:ea typeface="Aptos"/>
+                <a:cs typeface="Aptos"/>
+              </a:rPr>
+              <a:t>9</a:t>
+            </a:r>
+            <a:endParaRPr lang="en-US" sz="1425" b="0">
               <a:solidFill>
-                <a:srgbClr val="D0D9E4"/>
+                <a:schemeClr val="tx1"/>
               </a:solidFill>
               <a:latin typeface="Aptos"/>
               <a:ea typeface="Aptos"/>
